--- a/linear_algebra/2-scalar-vector-matrix/2-vector-operations-addition-scalar-product-dot-product.pptx
+++ b/linear_algebra/2-scalar-vector-matrix/2-vector-operations-addition-scalar-product-dot-product.pptx
@@ -5,22 +5,23 @@
     <p:sldMasterId id="2147483648" r:id="rId1"/>
   </p:sldMasterIdLst>
   <p:notesMasterIdLst>
-    <p:notesMasterId r:id="rId12"/>
+    <p:notesMasterId r:id="rId13"/>
   </p:notesMasterIdLst>
   <p:handoutMasterIdLst>
-    <p:handoutMasterId r:id="rId13"/>
+    <p:handoutMasterId r:id="rId14"/>
   </p:handoutMasterIdLst>
   <p:sldIdLst>
     <p:sldId id="271" r:id="rId2"/>
-    <p:sldId id="272" r:id="rId3"/>
-    <p:sldId id="273" r:id="rId4"/>
-    <p:sldId id="364" r:id="rId5"/>
-    <p:sldId id="359" r:id="rId6"/>
-    <p:sldId id="360" r:id="rId7"/>
-    <p:sldId id="361" r:id="rId8"/>
-    <p:sldId id="363" r:id="rId9"/>
-    <p:sldId id="366" r:id="rId10"/>
-    <p:sldId id="298" r:id="rId11"/>
+    <p:sldId id="367" r:id="rId3"/>
+    <p:sldId id="272" r:id="rId4"/>
+    <p:sldId id="273" r:id="rId5"/>
+    <p:sldId id="364" r:id="rId6"/>
+    <p:sldId id="359" r:id="rId7"/>
+    <p:sldId id="360" r:id="rId8"/>
+    <p:sldId id="361" r:id="rId9"/>
+    <p:sldId id="363" r:id="rId10"/>
+    <p:sldId id="366" r:id="rId11"/>
+    <p:sldId id="298" r:id="rId12"/>
   </p:sldIdLst>
   <p:sldSz cx="12192000" cy="6858000"/>
   <p:notesSz cx="6858000" cy="9144000"/>
@@ -4889,6 +4890,36 @@
           </p:sp>
         </mc:Fallback>
       </mc:AlternateContent>
+      <p:pic>
+        <p:nvPicPr>
+          <p:cNvPr id="3" name="Picture 2">
+            <a:extLst>
+              <a:ext uri="{FF2B5EF4-FFF2-40B4-BE49-F238E27FC236}">
+                <a16:creationId xmlns:a16="http://schemas.microsoft.com/office/drawing/2014/main" id="{5FB18984-6BC8-FC2D-CDF2-56600650CF2A}"/>
+              </a:ext>
+            </a:extLst>
+          </p:cNvPr>
+          <p:cNvPicPr>
+            <a:picLocks noChangeAspect="1"/>
+          </p:cNvPicPr>
+          <p:nvPr/>
+        </p:nvPicPr>
+        <p:blipFill>
+          <a:blip r:embed="rId3"/>
+          <a:stretch>
+            <a:fillRect/>
+          </a:stretch>
+        </p:blipFill>
+        <p:spPr>
+          <a:xfrm>
+            <a:off x="8079499" y="405410"/>
+            <a:ext cx="2543530" cy="2353003"/>
+          </a:xfrm>
+          <a:prstGeom prst="rect">
+            <a:avLst/>
+          </a:prstGeom>
+        </p:spPr>
+      </p:pic>
     </p:spTree>
     <p:extLst>
       <p:ext uri="{BB962C8B-B14F-4D97-AF65-F5344CB8AC3E}">
@@ -4903,6 +4934,254 @@
 </file>
 
 <file path=ppt/slides/slide10.xml><?xml version="1.0" encoding="utf-8"?>
+<p:sld xmlns:a="http://schemas.openxmlformats.org/drawingml/2006/main" xmlns:r="http://schemas.openxmlformats.org/officeDocument/2006/relationships" xmlns:p="http://schemas.openxmlformats.org/presentationml/2006/main">
+  <p:cSld>
+    <p:spTree>
+      <p:nvGrpSpPr>
+        <p:cNvPr id="1" name="">
+          <a:extLst>
+            <a:ext uri="{FF2B5EF4-FFF2-40B4-BE49-F238E27FC236}">
+              <a16:creationId xmlns:a16="http://schemas.microsoft.com/office/drawing/2014/main" id="{7E5A4533-A9E4-C7FF-CA19-D57FAD6AD8D4}"/>
+            </a:ext>
+          </a:extLst>
+        </p:cNvPr>
+        <p:cNvGrpSpPr/>
+        <p:nvPr/>
+      </p:nvGrpSpPr>
+      <p:grpSpPr>
+        <a:xfrm>
+          <a:off x="0" y="0"/>
+          <a:ext cx="0" cy="0"/>
+          <a:chOff x="0" y="0"/>
+          <a:chExt cx="0" cy="0"/>
+        </a:xfrm>
+      </p:grpSpPr>
+      <p:pic>
+        <p:nvPicPr>
+          <p:cNvPr id="10" name="Picture 9">
+            <a:extLst>
+              <a:ext uri="{FF2B5EF4-FFF2-40B4-BE49-F238E27FC236}">
+                <a16:creationId xmlns:a16="http://schemas.microsoft.com/office/drawing/2014/main" id="{D84810E0-9A37-7DD6-9620-C74ED60E8B7C}"/>
+              </a:ext>
+            </a:extLst>
+          </p:cNvPr>
+          <p:cNvPicPr>
+            <a:picLocks noChangeAspect="1"/>
+          </p:cNvPicPr>
+          <p:nvPr/>
+        </p:nvPicPr>
+        <p:blipFill>
+          <a:blip r:embed="rId2"/>
+          <a:stretch>
+            <a:fillRect/>
+          </a:stretch>
+        </p:blipFill>
+        <p:spPr>
+          <a:xfrm>
+            <a:off x="137160" y="134554"/>
+            <a:ext cx="10783824" cy="1885129"/>
+          </a:xfrm>
+          <a:prstGeom prst="rect">
+            <a:avLst/>
+          </a:prstGeom>
+        </p:spPr>
+      </p:pic>
+      <p:pic>
+        <p:nvPicPr>
+          <p:cNvPr id="13" name="Picture 12">
+            <a:extLst>
+              <a:ext uri="{FF2B5EF4-FFF2-40B4-BE49-F238E27FC236}">
+                <a16:creationId xmlns:a16="http://schemas.microsoft.com/office/drawing/2014/main" id="{AF4AC8F7-44A3-27EE-8900-FDABB29EC4DA}"/>
+              </a:ext>
+            </a:extLst>
+          </p:cNvPr>
+          <p:cNvPicPr>
+            <a:picLocks noChangeAspect="1"/>
+          </p:cNvPicPr>
+          <p:nvPr/>
+        </p:nvPicPr>
+        <p:blipFill>
+          <a:blip r:embed="rId3"/>
+          <a:stretch>
+            <a:fillRect/>
+          </a:stretch>
+        </p:blipFill>
+        <p:spPr>
+          <a:xfrm>
+            <a:off x="137160" y="2330579"/>
+            <a:ext cx="7028780" cy="4291031"/>
+          </a:xfrm>
+          <a:prstGeom prst="rect">
+            <a:avLst/>
+          </a:prstGeom>
+        </p:spPr>
+      </p:pic>
+      <p:sp>
+        <p:nvSpPr>
+          <p:cNvPr id="14" name="TextBox 13">
+            <a:extLst>
+              <a:ext uri="{FF2B5EF4-FFF2-40B4-BE49-F238E27FC236}">
+                <a16:creationId xmlns:a16="http://schemas.microsoft.com/office/drawing/2014/main" id="{6B6C0FA0-C5A6-4BF7-171F-1D4455C08EE4}"/>
+              </a:ext>
+            </a:extLst>
+          </p:cNvPr>
+          <p:cNvSpPr txBox="1"/>
+          <p:nvPr/>
+        </p:nvSpPr>
+        <p:spPr>
+          <a:xfrm>
+            <a:off x="7498080" y="3941064"/>
+            <a:ext cx="4977384" cy="1569660"/>
+          </a:xfrm>
+          <a:prstGeom prst="rect">
+            <a:avLst/>
+          </a:prstGeom>
+          <a:noFill/>
+        </p:spPr>
+        <p:txBody>
+          <a:bodyPr wrap="square" rtlCol="0">
+            <a:spAutoFit/>
+          </a:bodyPr>
+          <a:lstStyle/>
+          <a:p>
+            <a:r>
+              <a:rPr lang="en-US" sz="2400" dirty="0">
+                <a:solidFill>
+                  <a:schemeClr val="accent6">
+                    <a:lumMod val="60000"/>
+                    <a:lumOff val="40000"/>
+                  </a:schemeClr>
+                </a:solidFill>
+              </a:rPr>
+              <a:t>Conclusion:</a:t>
+            </a:r>
+          </a:p>
+          <a:p>
+            <a:pPr marL="285750" indent="-285750">
+              <a:buFontTx/>
+              <a:buChar char="-"/>
+            </a:pPr>
+            <a:r>
+              <a:rPr lang="en-US" sz="2400" dirty="0" err="1">
+                <a:solidFill>
+                  <a:schemeClr val="accent6">
+                    <a:lumMod val="60000"/>
+                    <a:lumOff val="40000"/>
+                  </a:schemeClr>
+                </a:solidFill>
+              </a:rPr>
+              <a:t>doc_a</a:t>
+            </a:r>
+            <a:r>
+              <a:rPr lang="en-US" sz="2400" dirty="0">
+                <a:solidFill>
+                  <a:schemeClr val="accent6">
+                    <a:lumMod val="60000"/>
+                    <a:lumOff val="40000"/>
+                  </a:schemeClr>
+                </a:solidFill>
+              </a:rPr>
+              <a:t> and </a:t>
+            </a:r>
+            <a:r>
+              <a:rPr lang="en-US" sz="2400" dirty="0" err="1">
+                <a:solidFill>
+                  <a:schemeClr val="accent6">
+                    <a:lumMod val="60000"/>
+                    <a:lumOff val="40000"/>
+                  </a:schemeClr>
+                </a:solidFill>
+              </a:rPr>
+              <a:t>doc_b</a:t>
+            </a:r>
+            <a:r>
+              <a:rPr lang="en-US" sz="2400" dirty="0">
+                <a:solidFill>
+                  <a:schemeClr val="accent6">
+                    <a:lumMod val="60000"/>
+                    <a:lumOff val="40000"/>
+                  </a:schemeClr>
+                </a:solidFill>
+              </a:rPr>
+              <a:t> are similar.</a:t>
+            </a:r>
+          </a:p>
+          <a:p>
+            <a:pPr marL="285750" indent="-285750">
+              <a:buFontTx/>
+              <a:buChar char="-"/>
+            </a:pPr>
+            <a:r>
+              <a:rPr lang="en-US" sz="2400" dirty="0" err="1">
+                <a:solidFill>
+                  <a:schemeClr val="accent6">
+                    <a:lumMod val="60000"/>
+                    <a:lumOff val="40000"/>
+                  </a:schemeClr>
+                </a:solidFill>
+              </a:rPr>
+              <a:t>doc_a</a:t>
+            </a:r>
+            <a:r>
+              <a:rPr lang="en-US" sz="2400" dirty="0">
+                <a:solidFill>
+                  <a:schemeClr val="accent6">
+                    <a:lumMod val="60000"/>
+                    <a:lumOff val="40000"/>
+                  </a:schemeClr>
+                </a:solidFill>
+              </a:rPr>
+              <a:t> and </a:t>
+            </a:r>
+            <a:r>
+              <a:rPr lang="en-US" sz="2400" dirty="0" err="1">
+                <a:solidFill>
+                  <a:schemeClr val="accent6">
+                    <a:lumMod val="60000"/>
+                    <a:lumOff val="40000"/>
+                  </a:schemeClr>
+                </a:solidFill>
+              </a:rPr>
+              <a:t>doc_c</a:t>
+            </a:r>
+            <a:r>
+              <a:rPr lang="en-US" sz="2400" dirty="0">
+                <a:solidFill>
+                  <a:schemeClr val="accent6">
+                    <a:lumMod val="60000"/>
+                    <a:lumOff val="40000"/>
+                  </a:schemeClr>
+                </a:solidFill>
+              </a:rPr>
+              <a:t> are not similar</a:t>
+            </a:r>
+          </a:p>
+          <a:p>
+            <a:endParaRPr lang="en-US" sz="2400" dirty="0">
+              <a:solidFill>
+                <a:schemeClr val="accent6">
+                  <a:lumMod val="60000"/>
+                  <a:lumOff val="40000"/>
+                </a:schemeClr>
+              </a:solidFill>
+            </a:endParaRPr>
+          </a:p>
+        </p:txBody>
+      </p:sp>
+    </p:spTree>
+    <p:extLst>
+      <p:ext uri="{BB962C8B-B14F-4D97-AF65-F5344CB8AC3E}">
+        <p14:creationId xmlns:p14="http://schemas.microsoft.com/office/powerpoint/2010/main" val="4003191733"/>
+      </p:ext>
+    </p:extLst>
+  </p:cSld>
+  <p:clrMapOvr>
+    <a:masterClrMapping/>
+  </p:clrMapOvr>
+</p:sld>
+</file>
+
+<file path=ppt/slides/slide11.xml><?xml version="1.0" encoding="utf-8"?>
 <p:sld xmlns:a="http://schemas.openxmlformats.org/drawingml/2006/main" xmlns:r="http://schemas.openxmlformats.org/officeDocument/2006/relationships" xmlns:p="http://schemas.openxmlformats.org/presentationml/2006/main">
   <p:cSld>
     <p:spTree>
@@ -4939,6 +5218,508 @@
 </file>
 
 <file path=ppt/slides/slide2.xml><?xml version="1.0" encoding="utf-8"?>
+<p:sld xmlns:a="http://schemas.openxmlformats.org/drawingml/2006/main" xmlns:r="http://schemas.openxmlformats.org/officeDocument/2006/relationships" xmlns:p="http://schemas.openxmlformats.org/presentationml/2006/main">
+  <p:cSld>
+    <p:spTree>
+      <p:nvGrpSpPr>
+        <p:cNvPr id="1" name="">
+          <a:extLst>
+            <a:ext uri="{FF2B5EF4-FFF2-40B4-BE49-F238E27FC236}">
+              <a16:creationId xmlns:a16="http://schemas.microsoft.com/office/drawing/2014/main" id="{345E4804-B009-A5A3-267C-03DD32A6B049}"/>
+            </a:ext>
+          </a:extLst>
+        </p:cNvPr>
+        <p:cNvGrpSpPr/>
+        <p:nvPr/>
+      </p:nvGrpSpPr>
+      <p:grpSpPr>
+        <a:xfrm>
+          <a:off x="0" y="0"/>
+          <a:ext cx="0" cy="0"/>
+          <a:chOff x="0" y="0"/>
+          <a:chExt cx="0" cy="0"/>
+        </a:xfrm>
+      </p:grpSpPr>
+      <mc:AlternateContent xmlns:mc="http://schemas.openxmlformats.org/markup-compatibility/2006">
+        <mc:Choice xmlns:a14="http://schemas.microsoft.com/office/drawing/2010/main" Requires="a14">
+          <p:sp>
+            <p:nvSpPr>
+              <p:cNvPr id="4" name="TextBox 3">
+                <a:extLst>
+                  <a:ext uri="{FF2B5EF4-FFF2-40B4-BE49-F238E27FC236}">
+                    <a16:creationId xmlns:a16="http://schemas.microsoft.com/office/drawing/2014/main" id="{96E1FEED-225F-BE1B-7909-CBD6134F1056}"/>
+                  </a:ext>
+                </a:extLst>
+              </p:cNvPr>
+              <p:cNvSpPr txBox="1"/>
+              <p:nvPr/>
+            </p:nvSpPr>
+            <p:spPr>
+              <a:xfrm>
+                <a:off x="347472" y="274749"/>
+                <a:ext cx="11347704" cy="3156120"/>
+              </a:xfrm>
+              <a:prstGeom prst="rect">
+                <a:avLst/>
+              </a:prstGeom>
+              <a:noFill/>
+            </p:spPr>
+            <p:txBody>
+              <a:bodyPr wrap="square">
+                <a:spAutoFit/>
+              </a:bodyPr>
+              <a:lstStyle/>
+              <a:p>
+                <a:pPr marL="0" indent="0">
+                  <a:buNone/>
+                </a:pPr>
+                <a:r>
+                  <a:rPr lang="en-US" sz="2400" b="1" dirty="0">
+                    <a:solidFill>
+                      <a:schemeClr val="accent6">
+                        <a:lumMod val="60000"/>
+                        <a:lumOff val="40000"/>
+                      </a:schemeClr>
+                    </a:solidFill>
+                  </a:rPr>
+                  <a:t>Vector subtraction:</a:t>
+                </a:r>
+              </a:p>
+              <a:p>
+                <a:pPr marL="0" indent="0">
+                  <a:buNone/>
+                </a:pPr>
+                <a:endParaRPr lang="en-US" sz="2400" b="1" dirty="0">
+                  <a:solidFill>
+                    <a:schemeClr val="accent6">
+                      <a:lumMod val="60000"/>
+                      <a:lumOff val="40000"/>
+                    </a:schemeClr>
+                  </a:solidFill>
+                </a:endParaRPr>
+              </a:p>
+              <a:p>
+                <a:pPr/>
+                <a14:m>
+                  <m:oMathPara xmlns:m="http://schemas.openxmlformats.org/officeDocument/2006/math">
+                    <m:oMathParaPr>
+                      <m:jc m:val="centerGroup"/>
+                    </m:oMathParaPr>
+                    <m:oMath xmlns:m="http://schemas.openxmlformats.org/officeDocument/2006/math">
+                      <m:acc>
+                        <m:accPr>
+                          <m:chr m:val="⃗"/>
+                          <m:ctrlPr>
+                            <a:rPr lang="en-US" sz="2400" i="1" dirty="0">
+                              <a:solidFill>
+                                <a:schemeClr val="accent6">
+                                  <a:lumMod val="60000"/>
+                                  <a:lumOff val="40000"/>
+                                </a:schemeClr>
+                              </a:solidFill>
+                              <a:latin typeface="Cambria Math" panose="02040503050406030204" pitchFamily="18" charset="0"/>
+                            </a:rPr>
+                          </m:ctrlPr>
+                        </m:accPr>
+                        <m:e>
+                          <m:r>
+                            <a:rPr lang="en-US" sz="2400" i="1" dirty="0">
+                              <a:solidFill>
+                                <a:schemeClr val="accent6">
+                                  <a:lumMod val="60000"/>
+                                  <a:lumOff val="40000"/>
+                                </a:schemeClr>
+                              </a:solidFill>
+                              <a:latin typeface="Cambria Math" panose="02040503050406030204" pitchFamily="18" charset="0"/>
+                            </a:rPr>
+                            <m:t>𝑎</m:t>
+                          </m:r>
+                        </m:e>
+                      </m:acc>
+                      <m:r>
+                        <a:rPr lang="en-US" sz="2400" i="1" dirty="0">
+                          <a:solidFill>
+                            <a:schemeClr val="accent6">
+                              <a:lumMod val="60000"/>
+                              <a:lumOff val="40000"/>
+                            </a:schemeClr>
+                          </a:solidFill>
+                          <a:latin typeface="Cambria Math" panose="02040503050406030204" pitchFamily="18" charset="0"/>
+                        </a:rPr>
+                        <m:t>=</m:t>
+                      </m:r>
+                      <m:d>
+                        <m:dPr>
+                          <m:ctrlPr>
+                            <a:rPr lang="en-US" sz="2400" i="1" dirty="0">
+                              <a:solidFill>
+                                <a:schemeClr val="accent6">
+                                  <a:lumMod val="60000"/>
+                                  <a:lumOff val="40000"/>
+                                </a:schemeClr>
+                              </a:solidFill>
+                              <a:latin typeface="Cambria Math" panose="02040503050406030204" pitchFamily="18" charset="0"/>
+                            </a:rPr>
+                          </m:ctrlPr>
+                        </m:dPr>
+                        <m:e>
+                          <m:r>
+                            <a:rPr lang="en-US" sz="2400" i="1" dirty="0">
+                              <a:solidFill>
+                                <a:schemeClr val="accent6">
+                                  <a:lumMod val="60000"/>
+                                  <a:lumOff val="40000"/>
+                                </a:schemeClr>
+                              </a:solidFill>
+                              <a:latin typeface="Cambria Math" panose="02040503050406030204" pitchFamily="18" charset="0"/>
+                            </a:rPr>
+                            <m:t>2, 3, </m:t>
+                          </m:r>
+                          <m:r>
+                            <a:rPr lang="en-US" sz="2400" b="0" i="1" dirty="0" smtClean="0">
+                              <a:solidFill>
+                                <a:schemeClr val="accent6">
+                                  <a:lumMod val="60000"/>
+                                  <a:lumOff val="40000"/>
+                                </a:schemeClr>
+                              </a:solidFill>
+                              <a:latin typeface="Cambria Math" panose="02040503050406030204" pitchFamily="18" charset="0"/>
+                            </a:rPr>
+                            <m:t>6</m:t>
+                          </m:r>
+                        </m:e>
+                      </m:d>
+                    </m:oMath>
+                  </m:oMathPara>
+                </a14:m>
+                <a:endParaRPr lang="en-US" sz="2400" dirty="0">
+                  <a:solidFill>
+                    <a:schemeClr val="accent6">
+                      <a:lumMod val="60000"/>
+                      <a:lumOff val="40000"/>
+                    </a:schemeClr>
+                  </a:solidFill>
+                </a:endParaRPr>
+              </a:p>
+              <a:p>
+                <a:pPr/>
+                <a14:m>
+                  <m:oMathPara xmlns:m="http://schemas.openxmlformats.org/officeDocument/2006/math">
+                    <m:oMathParaPr>
+                      <m:jc m:val="centerGroup"/>
+                    </m:oMathParaPr>
+                    <m:oMath xmlns:m="http://schemas.openxmlformats.org/officeDocument/2006/math">
+                      <m:acc>
+                        <m:accPr>
+                          <m:chr m:val="⃗"/>
+                          <m:ctrlPr>
+                            <a:rPr lang="en-US" sz="2400" i="1" dirty="0">
+                              <a:solidFill>
+                                <a:schemeClr val="accent6">
+                                  <a:lumMod val="60000"/>
+                                  <a:lumOff val="40000"/>
+                                </a:schemeClr>
+                              </a:solidFill>
+                              <a:latin typeface="Cambria Math" panose="02040503050406030204" pitchFamily="18" charset="0"/>
+                            </a:rPr>
+                          </m:ctrlPr>
+                        </m:accPr>
+                        <m:e>
+                          <m:r>
+                            <a:rPr lang="en-US" sz="2400" i="1" dirty="0">
+                              <a:solidFill>
+                                <a:schemeClr val="accent6">
+                                  <a:lumMod val="60000"/>
+                                  <a:lumOff val="40000"/>
+                                </a:schemeClr>
+                              </a:solidFill>
+                              <a:latin typeface="Cambria Math" panose="02040503050406030204" pitchFamily="18" charset="0"/>
+                            </a:rPr>
+                            <m:t>𝑏</m:t>
+                          </m:r>
+                        </m:e>
+                      </m:acc>
+                      <m:r>
+                        <a:rPr lang="en-US" sz="2400" i="1" dirty="0">
+                          <a:solidFill>
+                            <a:schemeClr val="accent6">
+                              <a:lumMod val="60000"/>
+                              <a:lumOff val="40000"/>
+                            </a:schemeClr>
+                          </a:solidFill>
+                          <a:latin typeface="Cambria Math" panose="02040503050406030204" pitchFamily="18" charset="0"/>
+                        </a:rPr>
+                        <m:t>=</m:t>
+                      </m:r>
+                      <m:d>
+                        <m:dPr>
+                          <m:ctrlPr>
+                            <a:rPr lang="en-US" sz="2400" i="1" dirty="0">
+                              <a:solidFill>
+                                <a:schemeClr val="accent6">
+                                  <a:lumMod val="60000"/>
+                                  <a:lumOff val="40000"/>
+                                </a:schemeClr>
+                              </a:solidFill>
+                              <a:latin typeface="Cambria Math" panose="02040503050406030204" pitchFamily="18" charset="0"/>
+                            </a:rPr>
+                          </m:ctrlPr>
+                        </m:dPr>
+                        <m:e>
+                          <m:r>
+                            <a:rPr lang="en-US" sz="2400" i="1" dirty="0">
+                              <a:solidFill>
+                                <a:schemeClr val="accent6">
+                                  <a:lumMod val="60000"/>
+                                  <a:lumOff val="40000"/>
+                                </a:schemeClr>
+                              </a:solidFill>
+                              <a:latin typeface="Cambria Math" panose="02040503050406030204" pitchFamily="18" charset="0"/>
+                            </a:rPr>
+                            <m:t>3, 2, 5</m:t>
+                          </m:r>
+                        </m:e>
+                      </m:d>
+                    </m:oMath>
+                  </m:oMathPara>
+                </a14:m>
+                <a:endParaRPr lang="en-US" sz="2400" dirty="0">
+                  <a:solidFill>
+                    <a:schemeClr val="accent6">
+                      <a:lumMod val="60000"/>
+                      <a:lumOff val="40000"/>
+                    </a:schemeClr>
+                  </a:solidFill>
+                </a:endParaRPr>
+              </a:p>
+              <a:p>
+                <a:r>
+                  <a:rPr lang="en-US" sz="2400" dirty="0">
+                    <a:solidFill>
+                      <a:schemeClr val="accent6">
+                        <a:lumMod val="60000"/>
+                        <a:lumOff val="40000"/>
+                      </a:schemeClr>
+                    </a:solidFill>
+                  </a:rPr>
+                  <a:t>Here </a:t>
+                </a:r>
+                <a14:m>
+                  <m:oMath xmlns:m="http://schemas.openxmlformats.org/officeDocument/2006/math">
+                    <m:acc>
+                      <m:accPr>
+                        <m:chr m:val="⃗"/>
+                        <m:ctrlPr>
+                          <a:rPr lang="en-US" sz="2400" i="1" dirty="0">
+                            <a:solidFill>
+                              <a:schemeClr val="accent6">
+                                <a:lumMod val="60000"/>
+                                <a:lumOff val="40000"/>
+                              </a:schemeClr>
+                            </a:solidFill>
+                            <a:latin typeface="Cambria Math" panose="02040503050406030204" pitchFamily="18" charset="0"/>
+                          </a:rPr>
+                        </m:ctrlPr>
+                      </m:accPr>
+                      <m:e>
+                        <m:r>
+                          <a:rPr lang="en-US" sz="2400" i="1" dirty="0">
+                            <a:solidFill>
+                              <a:schemeClr val="accent6">
+                                <a:lumMod val="60000"/>
+                                <a:lumOff val="40000"/>
+                              </a:schemeClr>
+                            </a:solidFill>
+                            <a:latin typeface="Cambria Math" panose="02040503050406030204" pitchFamily="18" charset="0"/>
+                          </a:rPr>
+                          <m:t>𝑎</m:t>
+                        </m:r>
+                      </m:e>
+                    </m:acc>
+                  </m:oMath>
+                </a14:m>
+                <a:r>
+                  <a:rPr lang="en-US" sz="2400" dirty="0">
+                    <a:solidFill>
+                      <a:schemeClr val="accent6">
+                        <a:lumMod val="60000"/>
+                        <a:lumOff val="40000"/>
+                      </a:schemeClr>
+                    </a:solidFill>
+                  </a:rPr>
+                  <a:t> - </a:t>
+                </a:r>
+                <a14:m>
+                  <m:oMath xmlns:m="http://schemas.openxmlformats.org/officeDocument/2006/math">
+                    <m:acc>
+                      <m:accPr>
+                        <m:chr m:val="⃗"/>
+                        <m:ctrlPr>
+                          <a:rPr lang="en-US" sz="2400" i="1" dirty="0">
+                            <a:solidFill>
+                              <a:schemeClr val="accent6">
+                                <a:lumMod val="60000"/>
+                                <a:lumOff val="40000"/>
+                              </a:schemeClr>
+                            </a:solidFill>
+                            <a:latin typeface="Cambria Math" panose="02040503050406030204" pitchFamily="18" charset="0"/>
+                          </a:rPr>
+                        </m:ctrlPr>
+                      </m:accPr>
+                      <m:e>
+                        <m:r>
+                          <a:rPr lang="en-US" sz="2400" b="0" i="1" dirty="0" smtClean="0">
+                            <a:solidFill>
+                              <a:schemeClr val="accent6">
+                                <a:lumMod val="60000"/>
+                                <a:lumOff val="40000"/>
+                              </a:schemeClr>
+                            </a:solidFill>
+                            <a:latin typeface="Cambria Math" panose="02040503050406030204" pitchFamily="18" charset="0"/>
+                          </a:rPr>
+                          <m:t>𝑏</m:t>
+                        </m:r>
+                      </m:e>
+                    </m:acc>
+                  </m:oMath>
+                </a14:m>
+                <a:r>
+                  <a:rPr lang="en-US" sz="2400" dirty="0">
+                    <a:solidFill>
+                      <a:schemeClr val="accent6">
+                        <a:lumMod val="60000"/>
+                        <a:lumOff val="40000"/>
+                      </a:schemeClr>
+                    </a:solidFill>
+                  </a:rPr>
+                  <a:t> = (2 - 3, 3 - 2, 6 - 5) = (-1, 1, 1)</a:t>
+                </a:r>
+              </a:p>
+              <a:p>
+                <a:endParaRPr lang="en-US" sz="2400" dirty="0">
+                  <a:solidFill>
+                    <a:schemeClr val="accent6">
+                      <a:lumMod val="60000"/>
+                      <a:lumOff val="40000"/>
+                    </a:schemeClr>
+                  </a:solidFill>
+                </a:endParaRPr>
+              </a:p>
+              <a:p>
+                <a:endParaRPr lang="en-US" sz="2400" dirty="0">
+                  <a:solidFill>
+                    <a:schemeClr val="accent6">
+                      <a:lumMod val="60000"/>
+                      <a:lumOff val="40000"/>
+                    </a:schemeClr>
+                  </a:solidFill>
+                </a:endParaRPr>
+              </a:p>
+              <a:p>
+                <a:r>
+                  <a:rPr lang="en-US" sz="2400" dirty="0">
+                    <a:solidFill>
+                      <a:schemeClr val="accent6">
+                        <a:lumMod val="60000"/>
+                        <a:lumOff val="40000"/>
+                      </a:schemeClr>
+                    </a:solidFill>
+                  </a:rPr>
+                  <a:t>Condition: The size of vectors should be same</a:t>
+                </a:r>
+              </a:p>
+            </p:txBody>
+          </p:sp>
+        </mc:Choice>
+        <mc:Fallback>
+          <p:sp>
+            <p:nvSpPr>
+              <p:cNvPr id="4" name="TextBox 3">
+                <a:extLst>
+                  <a:ext uri="{FF2B5EF4-FFF2-40B4-BE49-F238E27FC236}">
+                    <a16:creationId xmlns:a16="http://schemas.microsoft.com/office/drawing/2014/main" id="{96E1FEED-225F-BE1B-7909-CBD6134F1056}"/>
+                  </a:ext>
+                </a:extLst>
+              </p:cNvPr>
+              <p:cNvSpPr txBox="1">
+                <a:spLocks noRot="1" noChangeAspect="1" noMove="1" noResize="1" noEditPoints="1" noAdjustHandles="1" noChangeArrowheads="1" noChangeShapeType="1" noTextEdit="1"/>
+              </p:cNvSpPr>
+              <p:nvPr/>
+            </p:nvSpPr>
+            <p:spPr>
+              <a:xfrm>
+                <a:off x="347472" y="274749"/>
+                <a:ext cx="11347704" cy="3156120"/>
+              </a:xfrm>
+              <a:prstGeom prst="rect">
+                <a:avLst/>
+              </a:prstGeom>
+              <a:blipFill>
+                <a:blip r:embed="rId2"/>
+                <a:stretch>
+                  <a:fillRect l="-806" t="-1544" b="-3475"/>
+                </a:stretch>
+              </a:blipFill>
+            </p:spPr>
+            <p:txBody>
+              <a:bodyPr/>
+              <a:lstStyle/>
+              <a:p>
+                <a:r>
+                  <a:rPr lang="en-US">
+                    <a:noFill/>
+                  </a:rPr>
+                  <a:t> </a:t>
+                </a:r>
+              </a:p>
+            </p:txBody>
+          </p:sp>
+        </mc:Fallback>
+      </mc:AlternateContent>
+      <p:pic>
+        <p:nvPicPr>
+          <p:cNvPr id="5" name="Picture 4">
+            <a:extLst>
+              <a:ext uri="{FF2B5EF4-FFF2-40B4-BE49-F238E27FC236}">
+                <a16:creationId xmlns:a16="http://schemas.microsoft.com/office/drawing/2014/main" id="{FBB2F1B3-F13B-A415-F954-DA580035AB23}"/>
+              </a:ext>
+            </a:extLst>
+          </p:cNvPr>
+          <p:cNvPicPr>
+            <a:picLocks noChangeAspect="1"/>
+          </p:cNvPicPr>
+          <p:nvPr/>
+        </p:nvPicPr>
+        <p:blipFill>
+          <a:blip r:embed="rId3"/>
+          <a:stretch>
+            <a:fillRect/>
+          </a:stretch>
+        </p:blipFill>
+        <p:spPr>
+          <a:xfrm>
+            <a:off x="6995626" y="1454469"/>
+            <a:ext cx="4848902" cy="2705478"/>
+          </a:xfrm>
+          <a:prstGeom prst="rect">
+            <a:avLst/>
+          </a:prstGeom>
+        </p:spPr>
+      </p:pic>
+    </p:spTree>
+    <p:extLst>
+      <p:ext uri="{BB962C8B-B14F-4D97-AF65-F5344CB8AC3E}">
+        <p14:creationId xmlns:p14="http://schemas.microsoft.com/office/powerpoint/2010/main" val="1212694638"/>
+      </p:ext>
+    </p:extLst>
+  </p:cSld>
+  <p:clrMapOvr>
+    <a:masterClrMapping/>
+  </p:clrMapOvr>
+</p:sld>
+</file>
+
+<file path=ppt/slides/slide3.xml><?xml version="1.0" encoding="utf-8"?>
 <p:sld xmlns:a="http://schemas.openxmlformats.org/drawingml/2006/main" xmlns:r="http://schemas.openxmlformats.org/officeDocument/2006/relationships" xmlns:p="http://schemas.openxmlformats.org/presentationml/2006/main">
   <p:cSld>
     <p:spTree>
@@ -5444,7 +6225,7 @@
 </p:sld>
 </file>
 
-<file path=ppt/slides/slide3.xml><?xml version="1.0" encoding="utf-8"?>
+<file path=ppt/slides/slide4.xml><?xml version="1.0" encoding="utf-8"?>
 <p:sld xmlns:a="http://schemas.openxmlformats.org/drawingml/2006/main" xmlns:r="http://schemas.openxmlformats.org/officeDocument/2006/relationships" xmlns:p="http://schemas.openxmlformats.org/presentationml/2006/main">
   <p:cSld>
     <p:spTree>
@@ -5757,7 +6538,7 @@
 </p:sld>
 </file>
 
-<file path=ppt/slides/slide4.xml><?xml version="1.0" encoding="utf-8"?>
+<file path=ppt/slides/slide5.xml><?xml version="1.0" encoding="utf-8"?>
 <p:sld xmlns:a="http://schemas.openxmlformats.org/drawingml/2006/main" xmlns:r="http://schemas.openxmlformats.org/officeDocument/2006/relationships" xmlns:p="http://schemas.openxmlformats.org/presentationml/2006/main">
   <p:cSld>
     <p:spTree>
@@ -5942,7 +6723,7 @@
           </a:p>
           <a:p>
             <a:r>
-              <a:rPr lang="en-US" sz="2400">
+              <a:rPr lang="en-US" sz="2400" dirty="0">
                 <a:solidFill>
                   <a:schemeClr val="accent6">
                     <a:lumMod val="60000"/>
@@ -5952,14 +6733,6 @@
               </a:rPr>
               <a:t>=  6 +  20 -7  = 19</a:t>
             </a:r>
-            <a:endParaRPr lang="en-US" sz="2400" dirty="0">
-              <a:solidFill>
-                <a:schemeClr val="accent6">
-                  <a:lumMod val="60000"/>
-                  <a:lumOff val="40000"/>
-                </a:schemeClr>
-              </a:solidFill>
-            </a:endParaRPr>
           </a:p>
           <a:p>
             <a:endParaRPr lang="en-US" sz="2400" dirty="0">
@@ -6130,7 +6903,7 @@
 </p:sld>
 </file>
 
-<file path=ppt/slides/slide5.xml><?xml version="1.0" encoding="utf-8"?>
+<file path=ppt/slides/slide6.xml><?xml version="1.0" encoding="utf-8"?>
 <p:sld xmlns:a="http://schemas.openxmlformats.org/drawingml/2006/main" xmlns:r="http://schemas.openxmlformats.org/officeDocument/2006/relationships" xmlns:p="http://schemas.openxmlformats.org/presentationml/2006/main">
   <p:cSld>
     <p:spTree>
@@ -6370,7 +7143,7 @@
 </p:sld>
 </file>
 
-<file path=ppt/slides/slide6.xml><?xml version="1.0" encoding="utf-8"?>
+<file path=ppt/slides/slide7.xml><?xml version="1.0" encoding="utf-8"?>
 <p:sld xmlns:a="http://schemas.openxmlformats.org/drawingml/2006/main" xmlns:r="http://schemas.openxmlformats.org/officeDocument/2006/relationships" xmlns:p="http://schemas.openxmlformats.org/presentationml/2006/main">
   <p:cSld>
     <p:spTree>
@@ -6928,7 +7701,7 @@
 </p:sld>
 </file>
 
-<file path=ppt/slides/slide7.xml><?xml version="1.0" encoding="utf-8"?>
+<file path=ppt/slides/slide8.xml><?xml version="1.0" encoding="utf-8"?>
 <p:sld xmlns:a="http://schemas.openxmlformats.org/drawingml/2006/main" xmlns:r="http://schemas.openxmlformats.org/officeDocument/2006/relationships" xmlns:p="http://schemas.openxmlformats.org/presentationml/2006/main">
   <p:cSld>
     <p:spTree>
@@ -7358,7 +8131,7 @@
 </p:sld>
 </file>
 
-<file path=ppt/slides/slide8.xml><?xml version="1.0" encoding="utf-8"?>
+<file path=ppt/slides/slide9.xml><?xml version="1.0" encoding="utf-8"?>
 <p:sld xmlns:a="http://schemas.openxmlformats.org/drawingml/2006/main" xmlns:r="http://schemas.openxmlformats.org/officeDocument/2006/relationships" xmlns:p="http://schemas.openxmlformats.org/presentationml/2006/main">
   <p:cSld>
     <p:spTree>
@@ -7468,254 +8241,6 @@
     <p:extLst>
       <p:ext uri="{BB962C8B-B14F-4D97-AF65-F5344CB8AC3E}">
         <p14:creationId xmlns:p14="http://schemas.microsoft.com/office/powerpoint/2010/main" val="1977065118"/>
-      </p:ext>
-    </p:extLst>
-  </p:cSld>
-  <p:clrMapOvr>
-    <a:masterClrMapping/>
-  </p:clrMapOvr>
-</p:sld>
-</file>
-
-<file path=ppt/slides/slide9.xml><?xml version="1.0" encoding="utf-8"?>
-<p:sld xmlns:a="http://schemas.openxmlformats.org/drawingml/2006/main" xmlns:r="http://schemas.openxmlformats.org/officeDocument/2006/relationships" xmlns:p="http://schemas.openxmlformats.org/presentationml/2006/main">
-  <p:cSld>
-    <p:spTree>
-      <p:nvGrpSpPr>
-        <p:cNvPr id="1" name="">
-          <a:extLst>
-            <a:ext uri="{FF2B5EF4-FFF2-40B4-BE49-F238E27FC236}">
-              <a16:creationId xmlns:a16="http://schemas.microsoft.com/office/drawing/2014/main" id="{7E5A4533-A9E4-C7FF-CA19-D57FAD6AD8D4}"/>
-            </a:ext>
-          </a:extLst>
-        </p:cNvPr>
-        <p:cNvGrpSpPr/>
-        <p:nvPr/>
-      </p:nvGrpSpPr>
-      <p:grpSpPr>
-        <a:xfrm>
-          <a:off x="0" y="0"/>
-          <a:ext cx="0" cy="0"/>
-          <a:chOff x="0" y="0"/>
-          <a:chExt cx="0" cy="0"/>
-        </a:xfrm>
-      </p:grpSpPr>
-      <p:pic>
-        <p:nvPicPr>
-          <p:cNvPr id="10" name="Picture 9">
-            <a:extLst>
-              <a:ext uri="{FF2B5EF4-FFF2-40B4-BE49-F238E27FC236}">
-                <a16:creationId xmlns:a16="http://schemas.microsoft.com/office/drawing/2014/main" id="{D84810E0-9A37-7DD6-9620-C74ED60E8B7C}"/>
-              </a:ext>
-            </a:extLst>
-          </p:cNvPr>
-          <p:cNvPicPr>
-            <a:picLocks noChangeAspect="1"/>
-          </p:cNvPicPr>
-          <p:nvPr/>
-        </p:nvPicPr>
-        <p:blipFill>
-          <a:blip r:embed="rId2"/>
-          <a:stretch>
-            <a:fillRect/>
-          </a:stretch>
-        </p:blipFill>
-        <p:spPr>
-          <a:xfrm>
-            <a:off x="137160" y="134554"/>
-            <a:ext cx="10783824" cy="1885129"/>
-          </a:xfrm>
-          <a:prstGeom prst="rect">
-            <a:avLst/>
-          </a:prstGeom>
-        </p:spPr>
-      </p:pic>
-      <p:pic>
-        <p:nvPicPr>
-          <p:cNvPr id="13" name="Picture 12">
-            <a:extLst>
-              <a:ext uri="{FF2B5EF4-FFF2-40B4-BE49-F238E27FC236}">
-                <a16:creationId xmlns:a16="http://schemas.microsoft.com/office/drawing/2014/main" id="{AF4AC8F7-44A3-27EE-8900-FDABB29EC4DA}"/>
-              </a:ext>
-            </a:extLst>
-          </p:cNvPr>
-          <p:cNvPicPr>
-            <a:picLocks noChangeAspect="1"/>
-          </p:cNvPicPr>
-          <p:nvPr/>
-        </p:nvPicPr>
-        <p:blipFill>
-          <a:blip r:embed="rId3"/>
-          <a:stretch>
-            <a:fillRect/>
-          </a:stretch>
-        </p:blipFill>
-        <p:spPr>
-          <a:xfrm>
-            <a:off x="137160" y="2330579"/>
-            <a:ext cx="7028780" cy="4291031"/>
-          </a:xfrm>
-          <a:prstGeom prst="rect">
-            <a:avLst/>
-          </a:prstGeom>
-        </p:spPr>
-      </p:pic>
-      <p:sp>
-        <p:nvSpPr>
-          <p:cNvPr id="14" name="TextBox 13">
-            <a:extLst>
-              <a:ext uri="{FF2B5EF4-FFF2-40B4-BE49-F238E27FC236}">
-                <a16:creationId xmlns:a16="http://schemas.microsoft.com/office/drawing/2014/main" id="{6B6C0FA0-C5A6-4BF7-171F-1D4455C08EE4}"/>
-              </a:ext>
-            </a:extLst>
-          </p:cNvPr>
-          <p:cNvSpPr txBox="1"/>
-          <p:nvPr/>
-        </p:nvSpPr>
-        <p:spPr>
-          <a:xfrm>
-            <a:off x="7498080" y="3941064"/>
-            <a:ext cx="4977384" cy="1569660"/>
-          </a:xfrm>
-          <a:prstGeom prst="rect">
-            <a:avLst/>
-          </a:prstGeom>
-          <a:noFill/>
-        </p:spPr>
-        <p:txBody>
-          <a:bodyPr wrap="square" rtlCol="0">
-            <a:spAutoFit/>
-          </a:bodyPr>
-          <a:lstStyle/>
-          <a:p>
-            <a:r>
-              <a:rPr lang="en-US" sz="2400" dirty="0">
-                <a:solidFill>
-                  <a:schemeClr val="accent6">
-                    <a:lumMod val="60000"/>
-                    <a:lumOff val="40000"/>
-                  </a:schemeClr>
-                </a:solidFill>
-              </a:rPr>
-              <a:t>Conclusion:</a:t>
-            </a:r>
-          </a:p>
-          <a:p>
-            <a:pPr marL="285750" indent="-285750">
-              <a:buFontTx/>
-              <a:buChar char="-"/>
-            </a:pPr>
-            <a:r>
-              <a:rPr lang="en-US" sz="2400" dirty="0" err="1">
-                <a:solidFill>
-                  <a:schemeClr val="accent6">
-                    <a:lumMod val="60000"/>
-                    <a:lumOff val="40000"/>
-                  </a:schemeClr>
-                </a:solidFill>
-              </a:rPr>
-              <a:t>doc_a</a:t>
-            </a:r>
-            <a:r>
-              <a:rPr lang="en-US" sz="2400" dirty="0">
-                <a:solidFill>
-                  <a:schemeClr val="accent6">
-                    <a:lumMod val="60000"/>
-                    <a:lumOff val="40000"/>
-                  </a:schemeClr>
-                </a:solidFill>
-              </a:rPr>
-              <a:t> and </a:t>
-            </a:r>
-            <a:r>
-              <a:rPr lang="en-US" sz="2400" dirty="0" err="1">
-                <a:solidFill>
-                  <a:schemeClr val="accent6">
-                    <a:lumMod val="60000"/>
-                    <a:lumOff val="40000"/>
-                  </a:schemeClr>
-                </a:solidFill>
-              </a:rPr>
-              <a:t>doc_b</a:t>
-            </a:r>
-            <a:r>
-              <a:rPr lang="en-US" sz="2400" dirty="0">
-                <a:solidFill>
-                  <a:schemeClr val="accent6">
-                    <a:lumMod val="60000"/>
-                    <a:lumOff val="40000"/>
-                  </a:schemeClr>
-                </a:solidFill>
-              </a:rPr>
-              <a:t> are similar.</a:t>
-            </a:r>
-          </a:p>
-          <a:p>
-            <a:pPr marL="285750" indent="-285750">
-              <a:buFontTx/>
-              <a:buChar char="-"/>
-            </a:pPr>
-            <a:r>
-              <a:rPr lang="en-US" sz="2400" dirty="0" err="1">
-                <a:solidFill>
-                  <a:schemeClr val="accent6">
-                    <a:lumMod val="60000"/>
-                    <a:lumOff val="40000"/>
-                  </a:schemeClr>
-                </a:solidFill>
-              </a:rPr>
-              <a:t>doc_a</a:t>
-            </a:r>
-            <a:r>
-              <a:rPr lang="en-US" sz="2400" dirty="0">
-                <a:solidFill>
-                  <a:schemeClr val="accent6">
-                    <a:lumMod val="60000"/>
-                    <a:lumOff val="40000"/>
-                  </a:schemeClr>
-                </a:solidFill>
-              </a:rPr>
-              <a:t> and </a:t>
-            </a:r>
-            <a:r>
-              <a:rPr lang="en-US" sz="2400" dirty="0" err="1">
-                <a:solidFill>
-                  <a:schemeClr val="accent6">
-                    <a:lumMod val="60000"/>
-                    <a:lumOff val="40000"/>
-                  </a:schemeClr>
-                </a:solidFill>
-              </a:rPr>
-              <a:t>doc_c</a:t>
-            </a:r>
-            <a:r>
-              <a:rPr lang="en-US" sz="2400" dirty="0">
-                <a:solidFill>
-                  <a:schemeClr val="accent6">
-                    <a:lumMod val="60000"/>
-                    <a:lumOff val="40000"/>
-                  </a:schemeClr>
-                </a:solidFill>
-              </a:rPr>
-              <a:t> are not similar</a:t>
-            </a:r>
-          </a:p>
-          <a:p>
-            <a:endParaRPr lang="en-US" sz="2400" dirty="0">
-              <a:solidFill>
-                <a:schemeClr val="accent6">
-                  <a:lumMod val="60000"/>
-                  <a:lumOff val="40000"/>
-                </a:schemeClr>
-              </a:solidFill>
-            </a:endParaRPr>
-          </a:p>
-        </p:txBody>
-      </p:sp>
-    </p:spTree>
-    <p:extLst>
-      <p:ext uri="{BB962C8B-B14F-4D97-AF65-F5344CB8AC3E}">
-        <p14:creationId xmlns:p14="http://schemas.microsoft.com/office/powerpoint/2010/main" val="4003191733"/>
       </p:ext>
     </p:extLst>
   </p:cSld>
